--- a/src/ppt-super/assets/tpl-35-cover/template.pptx
+++ b/src/ppt-super/assets/tpl-35-cover/template.pptx
@@ -3282,11 +3282,17 @@
           <a:p>
             <a:pPr algn="l">
               <a:lnSpc>
-                <a:spcPct val="112000"/>
+                <a:spcPct val="94000"/>
               </a:lnSpc>
+              <a:spcBef>
+                <a:spcPts val="0"/>
+              </a:spcBef>
+              <a:spcAft>
+                <a:spcPts val="0"/>
+              </a:spcAft>
             </a:pPr>
             <a:r>
-              <a:rPr sz="3000" b="1" i="0">
+              <a:rPr sz="2850" b="1" i="0">
                 <a:solidFill>
                   <a:srgbClr val="B90A0A"/>
                 </a:solidFill>
@@ -3299,11 +3305,17 @@
           <a:p>
             <a:pPr algn="l">
               <a:lnSpc>
-                <a:spcPct val="112000"/>
+                <a:spcPct val="94000"/>
               </a:lnSpc>
+              <a:spcBef>
+                <a:spcPts val="0"/>
+              </a:spcBef>
+              <a:spcAft>
+                <a:spcPts val="0"/>
+              </a:spcAft>
             </a:pPr>
             <a:r>
-              <a:rPr sz="3000" b="1" i="0">
+              <a:rPr sz="2850" b="1" i="0">
                 <a:solidFill>
                   <a:srgbClr val="B90A0A"/>
                 </a:solidFill>
@@ -3339,11 +3351,17 @@
           <a:p>
             <a:pPr algn="l">
               <a:lnSpc>
-                <a:spcPct val="112000"/>
+                <a:spcPct val="100000"/>
               </a:lnSpc>
+              <a:spcBef>
+                <a:spcPts val="0"/>
+              </a:spcBef>
+              <a:spcAft>
+                <a:spcPts val="0"/>
+              </a:spcAft>
             </a:pPr>
             <a:r>
-              <a:rPr sz="1600" b="0" i="0">
+              <a:rPr sz="1460" b="0" i="0">
                 <a:solidFill>
                   <a:srgbClr val="595959"/>
                 </a:solidFill>
@@ -3707,11 +3725,17 @@
           <a:p>
             <a:pPr algn="l">
               <a:lnSpc>
-                <a:spcPct val="112000"/>
+                <a:spcPct val="102000"/>
               </a:lnSpc>
+              <a:spcBef>
+                <a:spcPts val="0"/>
+              </a:spcBef>
+              <a:spcAft>
+                <a:spcPts val="0"/>
+              </a:spcAft>
             </a:pPr>
             <a:r>
-              <a:rPr sz="1500" b="0" i="0">
+              <a:rPr sz="1420" b="0" i="0">
                 <a:solidFill>
                   <a:srgbClr val="262626"/>
                 </a:solidFill>
@@ -3831,11 +3855,17 @@
           <a:p>
             <a:pPr algn="l">
               <a:lnSpc>
-                <a:spcPct val="112000"/>
+                <a:spcPct val="102000"/>
               </a:lnSpc>
+              <a:spcBef>
+                <a:spcPts val="0"/>
+              </a:spcBef>
+              <a:spcAft>
+                <a:spcPts val="0"/>
+              </a:spcAft>
             </a:pPr>
             <a:r>
-              <a:rPr sz="1500" b="0" i="0">
+              <a:rPr sz="1420" b="0" i="0">
                 <a:solidFill>
                   <a:srgbClr val="262626"/>
                 </a:solidFill>
@@ -3955,11 +3985,17 @@
           <a:p>
             <a:pPr algn="l">
               <a:lnSpc>
-                <a:spcPct val="112000"/>
+                <a:spcPct val="102000"/>
               </a:lnSpc>
+              <a:spcBef>
+                <a:spcPts val="0"/>
+              </a:spcBef>
+              <a:spcAft>
+                <a:spcPts val="0"/>
+              </a:spcAft>
             </a:pPr>
             <a:r>
-              <a:rPr sz="1500" b="0" i="0">
+              <a:rPr sz="1420" b="0" i="0">
                 <a:solidFill>
                   <a:srgbClr val="262626"/>
                 </a:solidFill>
